--- a/チーム制作の企画.pptx
+++ b/チーム制作の企画.pptx
@@ -200,7 +200,7 @@
           <a:p>
             <a:fld id="{C3C8D2A5-9276-4B3F-8B90-42502B5B24ED}" type="datetimeFigureOut">
               <a:rPr kumimoji="1" lang="ja-JP" altLang="en-US" smtClean="0"/>
-              <a:t>2026/4/23</a:t>
+              <a:t>2026/4/27</a:t>
             </a:fld>
             <a:endParaRPr kumimoji="1" lang="ja-JP" altLang="en-US"/>
           </a:p>
@@ -778,7 +778,7 @@
           <a:p>
             <a:fld id="{CFEF22BD-00DF-4C20-8D3A-CB5CE4FCC60C}" type="datetimeFigureOut">
               <a:rPr kumimoji="1" lang="ja-JP" altLang="en-US" smtClean="0"/>
-              <a:t>2026/4/23</a:t>
+              <a:t>2026/4/27</a:t>
             </a:fld>
             <a:endParaRPr kumimoji="1" lang="ja-JP" altLang="en-US"/>
           </a:p>
@@ -1008,7 +1008,7 @@
           <a:p>
             <a:fld id="{CFEF22BD-00DF-4C20-8D3A-CB5CE4FCC60C}" type="datetimeFigureOut">
               <a:rPr kumimoji="1" lang="ja-JP" altLang="en-US" smtClean="0"/>
-              <a:t>2026/4/23</a:t>
+              <a:t>2026/4/27</a:t>
             </a:fld>
             <a:endParaRPr kumimoji="1" lang="ja-JP" altLang="en-US"/>
           </a:p>
@@ -1248,7 +1248,7 @@
           <a:p>
             <a:fld id="{CFEF22BD-00DF-4C20-8D3A-CB5CE4FCC60C}" type="datetimeFigureOut">
               <a:rPr kumimoji="1" lang="ja-JP" altLang="en-US" smtClean="0"/>
-              <a:t>2026/4/23</a:t>
+              <a:t>2026/4/27</a:t>
             </a:fld>
             <a:endParaRPr kumimoji="1" lang="ja-JP" altLang="en-US"/>
           </a:p>
@@ -1478,7 +1478,7 @@
           <a:p>
             <a:fld id="{CFEF22BD-00DF-4C20-8D3A-CB5CE4FCC60C}" type="datetimeFigureOut">
               <a:rPr kumimoji="1" lang="ja-JP" altLang="en-US" smtClean="0"/>
-              <a:t>2026/4/23</a:t>
+              <a:t>2026/4/27</a:t>
             </a:fld>
             <a:endParaRPr kumimoji="1" lang="ja-JP" altLang="en-US"/>
           </a:p>
@@ -1753,7 +1753,7 @@
           <a:p>
             <a:fld id="{CFEF22BD-00DF-4C20-8D3A-CB5CE4FCC60C}" type="datetimeFigureOut">
               <a:rPr kumimoji="1" lang="ja-JP" altLang="en-US" smtClean="0"/>
-              <a:t>2026/4/23</a:t>
+              <a:t>2026/4/27</a:t>
             </a:fld>
             <a:endParaRPr kumimoji="1" lang="ja-JP" altLang="en-US"/>
           </a:p>
@@ -2082,7 +2082,7 @@
           <a:p>
             <a:fld id="{CFEF22BD-00DF-4C20-8D3A-CB5CE4FCC60C}" type="datetimeFigureOut">
               <a:rPr kumimoji="1" lang="ja-JP" altLang="en-US" smtClean="0"/>
-              <a:t>2026/4/23</a:t>
+              <a:t>2026/4/27</a:t>
             </a:fld>
             <a:endParaRPr kumimoji="1" lang="ja-JP" altLang="en-US"/>
           </a:p>
@@ -2558,7 +2558,7 @@
           <a:p>
             <a:fld id="{CFEF22BD-00DF-4C20-8D3A-CB5CE4FCC60C}" type="datetimeFigureOut">
               <a:rPr kumimoji="1" lang="ja-JP" altLang="en-US" smtClean="0"/>
-              <a:t>2026/4/23</a:t>
+              <a:t>2026/4/27</a:t>
             </a:fld>
             <a:endParaRPr kumimoji="1" lang="ja-JP" altLang="en-US"/>
           </a:p>
@@ -2699,7 +2699,7 @@
           <a:p>
             <a:fld id="{CFEF22BD-00DF-4C20-8D3A-CB5CE4FCC60C}" type="datetimeFigureOut">
               <a:rPr kumimoji="1" lang="ja-JP" altLang="en-US" smtClean="0"/>
-              <a:t>2026/4/23</a:t>
+              <a:t>2026/4/27</a:t>
             </a:fld>
             <a:endParaRPr kumimoji="1" lang="ja-JP" altLang="en-US"/>
           </a:p>
@@ -2812,7 +2812,7 @@
           <a:p>
             <a:fld id="{CFEF22BD-00DF-4C20-8D3A-CB5CE4FCC60C}" type="datetimeFigureOut">
               <a:rPr kumimoji="1" lang="ja-JP" altLang="en-US" smtClean="0"/>
-              <a:t>2026/4/23</a:t>
+              <a:t>2026/4/27</a:t>
             </a:fld>
             <a:endParaRPr kumimoji="1" lang="ja-JP" altLang="en-US"/>
           </a:p>
@@ -3155,7 +3155,7 @@
           <a:p>
             <a:fld id="{CFEF22BD-00DF-4C20-8D3A-CB5CE4FCC60C}" type="datetimeFigureOut">
               <a:rPr kumimoji="1" lang="ja-JP" altLang="en-US" smtClean="0"/>
-              <a:t>2026/4/23</a:t>
+              <a:t>2026/4/27</a:t>
             </a:fld>
             <a:endParaRPr kumimoji="1" lang="ja-JP" altLang="en-US"/>
           </a:p>
@@ -3443,7 +3443,7 @@
           <a:p>
             <a:fld id="{CFEF22BD-00DF-4C20-8D3A-CB5CE4FCC60C}" type="datetimeFigureOut">
               <a:rPr kumimoji="1" lang="ja-JP" altLang="en-US" smtClean="0"/>
-              <a:t>2026/4/23</a:t>
+              <a:t>2026/4/27</a:t>
             </a:fld>
             <a:endParaRPr kumimoji="1" lang="ja-JP" altLang="en-US"/>
           </a:p>
@@ -3716,7 +3716,7 @@
           <a:p>
             <a:fld id="{CFEF22BD-00DF-4C20-8D3A-CB5CE4FCC60C}" type="datetimeFigureOut">
               <a:rPr kumimoji="1" lang="ja-JP" altLang="en-US" smtClean="0"/>
-              <a:t>2026/4/23</a:t>
+              <a:t>2026/4/27</a:t>
             </a:fld>
             <a:endParaRPr kumimoji="1" lang="ja-JP" altLang="en-US"/>
           </a:p>
@@ -4186,7 +4186,7 @@
         <p:spPr>
           <a:xfrm>
             <a:off x="692727" y="2411852"/>
-            <a:ext cx="4812145" cy="2746185"/>
+            <a:ext cx="4812145" cy="2866259"/>
           </a:xfrm>
         </p:spPr>
         <p:txBody>
@@ -4222,7 +4222,7 @@
             <a:pPr algn="l"/>
             <a:r>
               <a:rPr lang="ja-JP" altLang="en-US" dirty="0"/>
-              <a:t>装備は所持できない</a:t>
+              <a:t>装備は持ち物として所持できない</a:t>
             </a:r>
             <a:endParaRPr lang="en-US" altLang="ja-JP" dirty="0"/>
           </a:p>
@@ -4294,6 +4294,49 @@
             <a:r>
               <a:rPr kumimoji="1" lang="ja-JP" altLang="en-US" dirty="0"/>
               <a:t>画像</a:t>
+            </a:r>
+          </a:p>
+        </p:txBody>
+      </p:sp>
+      <p:sp>
+        <p:nvSpPr>
+          <p:cNvPr id="5" name="テキスト ボックス 4">
+            <a:extLst>
+              <a:ext uri="{FF2B5EF4-FFF2-40B4-BE49-F238E27FC236}">
+                <a16:creationId xmlns:a16="http://schemas.microsoft.com/office/drawing/2014/main" id="{B905342A-9CBC-EF41-BE68-60D8500B0CF9}"/>
+              </a:ext>
+            </a:extLst>
+          </p:cNvPr>
+          <p:cNvSpPr txBox="1"/>
+          <p:nvPr/>
+        </p:nvSpPr>
+        <p:spPr>
+          <a:xfrm>
+            <a:off x="692727" y="5551055"/>
+            <a:ext cx="2510624" cy="461665"/>
+          </a:xfrm>
+          <a:prstGeom prst="rect">
+            <a:avLst/>
+          </a:prstGeom>
+          <a:noFill/>
+        </p:spPr>
+        <p:txBody>
+          <a:bodyPr wrap="none" rtlCol="0">
+            <a:spAutoFit/>
+          </a:bodyPr>
+          <a:lstStyle/>
+          <a:p>
+            <a:r>
+              <a:rPr kumimoji="1" lang="ja-JP" altLang="en-US" sz="2400" dirty="0"/>
+              <a:t>プレイ人数：</a:t>
+            </a:r>
+            <a:r>
+              <a:rPr kumimoji="1" lang="en-US" altLang="ja-JP" sz="2400" dirty="0"/>
+              <a:t>1</a:t>
+            </a:r>
+            <a:r>
+              <a:rPr kumimoji="1" lang="ja-JP" altLang="en-US" sz="2400" dirty="0"/>
+              <a:t>人</a:t>
             </a:r>
           </a:p>
         </p:txBody>
